--- a/Presentation/thesisPresentation4.pptx
+++ b/Presentation/thesisPresentation4.pptx
@@ -257,7 +257,7 @@
           <a:p>
             <a:fld id="{F0833D1A-776C-2B44-AB57-E14B633AE185}" type="datetimeFigureOut">
               <a:rPr lang="en-US" smtClean="0"/>
-              <a:t>4/15/26</a:t>
+              <a:t>4/16/26</a:t>
             </a:fld>
             <a:endParaRPr lang="en-US"/>
           </a:p>
@@ -434,7 +434,7 @@
           <a:p>
             <a:fld id="{8DAFB3AD-FAF9-A04B-9767-E49F4F24F3E6}" type="datetimeFigureOut">
               <a:rPr lang="it-IT" smtClean="0"/>
-              <a:t>15/04/26</a:t>
+              <a:t>16/04/26</a:t>
             </a:fld>
             <a:endParaRPr lang="it-IT"/>
           </a:p>
@@ -7377,7 +7377,7 @@
         <p:spPr>
           <a:xfrm>
             <a:off x="551542" y="1151234"/>
-            <a:ext cx="4642963" cy="4441601"/>
+            <a:ext cx="4642963" cy="1810111"/>
           </a:xfrm>
           <a:prstGeom prst="rect">
             <a:avLst/>
@@ -7408,7 +7408,7 @@
             </a:pPr>
             <a:r>
               <a:rPr lang="en-US" sz="1900" dirty="0"/>
-              <a:t>Total Number of Data : 2</a:t>
+              <a:t>Total Number of Data : 2,593,267</a:t>
             </a:r>
           </a:p>
           <a:p>
@@ -7419,8 +7419,11 @@
             </a:pPr>
             <a:r>
               <a:rPr lang="en-US" sz="1900" dirty="0"/>
-              <a:t>
-593</a:t>
+              <a:t>Null values : 1873 in </a:t>
+            </a:r>
+            <a:r>
+              <a:rPr lang="en-US" sz="1900" u="sng" dirty="0"/>
+              <a:t>DTB</a:t>
             </a:r>
           </a:p>
           <a:p>
@@ -7431,46 +7434,7 @@
             </a:pPr>
             <a:r>
               <a:rPr lang="en-US" sz="1900" dirty="0"/>
-              <a:t>
-267</a:t>
-            </a:r>
-          </a:p>
-          <a:p>
-            <a:pPr>
-              <a:lnSpc>
-                <a:spcPct val="150000"/>
-              </a:lnSpc>
-            </a:pPr>
-            <a:r>
-              <a:rPr lang="en-US" sz="1900" dirty="0"/>
-              <a:t>Null values : 1873 in </a:t>
-            </a:r>
-            <a:r>
-              <a:rPr lang="en-US" sz="1900" u="sng" dirty="0"/>
-              <a:t>DTB</a:t>
-            </a:r>
-          </a:p>
-          <a:p>
-            <a:pPr>
-              <a:lnSpc>
-                <a:spcPct val="150000"/>
-              </a:lnSpc>
-            </a:pPr>
-            <a:r>
-              <a:rPr lang="en-US" sz="1900" dirty="0"/>
-              <a:t>error values : 118</a:t>
-            </a:r>
-          </a:p>
-          <a:p>
-            <a:pPr>
-              <a:lnSpc>
-                <a:spcPct val="150000"/>
-              </a:lnSpc>
-            </a:pPr>
-            <a:r>
-              <a:rPr lang="en-US" sz="1900" dirty="0"/>
-              <a:t>
-300 in </a:t>
+              <a:t>error values : 118,300 in </a:t>
             </a:r>
             <a:r>
               <a:rPr lang="en-US" sz="1900" u="sng" dirty="0"/>
@@ -10063,15 +10027,6 @@
 </file>
 
 <file path=customXml/item1.xml><?xml version="1.0" encoding="utf-8"?>
-<?mso-contentType ?>
-<FormTemplates xmlns="http://schemas.microsoft.com/sharepoint/v3/contenttype/forms">
-  <Display>DocumentLibraryForm</Display>
-  <Edit>DocumentLibraryForm</Edit>
-  <New>DocumentLibraryForm</New>
-</FormTemplates>
-</file>
-
-<file path=customXml/item2.xml><?xml version="1.0" encoding="utf-8"?>
 <ct:contentTypeSchema xmlns:ct="http://schemas.microsoft.com/office/2006/metadata/contentType" xmlns:ma="http://schemas.microsoft.com/office/2006/metadata/properties/metaAttributes" ct:_="" ma:_="" ma:contentTypeName="Documento" ma:contentTypeID="0x010100AD4CAB1AA5B43F4D9AAF01BADE0E3A4F" ma:contentTypeVersion="8" ma:contentTypeDescription="Creare un nuovo documento." ma:contentTypeScope="" ma:versionID="59c7fa7676cd10170f585e95f6181454">
   <xsd:schema xmlns:xsd="http://www.w3.org/2001/XMLSchema" xmlns:xs="http://www.w3.org/2001/XMLSchema" xmlns:p="http://schemas.microsoft.com/office/2006/metadata/properties" xmlns:ns2="ee8ce87a-fc1e-415b-8f19-964dc6e332da" targetNamespace="http://schemas.microsoft.com/office/2006/metadata/properties" ma:root="true" ma:fieldsID="e3f9aa92bd1d0291e55783ad41e7d77e" ns2:_="">
     <xsd:import namespace="ee8ce87a-fc1e-415b-8f19-964dc6e332da"/>
@@ -10239,21 +10194,22 @@
 </ct:contentTypeSchema>
 </file>
 
-<file path=customXml/item3.xml><?xml version="1.0" encoding="utf-8"?>
+<file path=customXml/item2.xml><?xml version="1.0" encoding="utf-8"?>
 <p:properties xmlns:p="http://schemas.microsoft.com/office/2006/metadata/properties" xmlns:xsi="http://www.w3.org/2001/XMLSchema-instance" xmlns:pc="http://schemas.microsoft.com/office/infopath/2007/PartnerControls">
   <documentManagement/>
 </p:properties>
 </file>
 
-<file path=customXml/itemProps1.xml><?xml version="1.0" encoding="utf-8"?>
-<ds:datastoreItem xmlns:ds="http://schemas.openxmlformats.org/officeDocument/2006/customXml" ds:itemID="{146FE114-0C58-4EEA-8876-F3C08EF0B541}">
-  <ds:schemaRefs>
-    <ds:schemaRef ds:uri="http://schemas.microsoft.com/sharepoint/v3/contenttype/forms"/>
-  </ds:schemaRefs>
-</ds:datastoreItem>
+<file path=customXml/item3.xml><?xml version="1.0" encoding="utf-8"?>
+<?mso-contentType ?>
+<FormTemplates xmlns="http://schemas.microsoft.com/sharepoint/v3/contenttype/forms">
+  <Display>DocumentLibraryForm</Display>
+  <Edit>DocumentLibraryForm</Edit>
+  <New>DocumentLibraryForm</New>
+</FormTemplates>
 </file>
 
-<file path=customXml/itemProps2.xml><?xml version="1.0" encoding="utf-8"?>
+<file path=customXml/itemProps1.xml><?xml version="1.0" encoding="utf-8"?>
 <ds:datastoreItem xmlns:ds="http://schemas.openxmlformats.org/officeDocument/2006/customXml" ds:itemID="{1B4A7BA3-74A2-491B-AF81-6CB1FF021800}">
   <ds:schemaRefs>
     <ds:schemaRef ds:uri="http://schemas.microsoft.com/office/2006/metadata/contentType"/>
@@ -10271,7 +10227,7 @@
 </ds:datastoreItem>
 </file>
 
-<file path=customXml/itemProps3.xml><?xml version="1.0" encoding="utf-8"?>
+<file path=customXml/itemProps2.xml><?xml version="1.0" encoding="utf-8"?>
 <ds:datastoreItem xmlns:ds="http://schemas.openxmlformats.org/officeDocument/2006/customXml" ds:itemID="{80F9F511-3832-4B05-91B3-5180D7ACFDC9}">
   <ds:schemaRefs>
     <ds:schemaRef ds:uri="http://purl.org/dc/terms/"/>
@@ -10285,4 +10241,12 @@
     <ds:schemaRef ds:uri="http://purl.org/dc/dcmitype/"/>
   </ds:schemaRefs>
 </ds:datastoreItem>
+</file>
+
+<file path=customXml/itemProps3.xml><?xml version="1.0" encoding="utf-8"?>
+<ds:datastoreItem xmlns:ds="http://schemas.openxmlformats.org/officeDocument/2006/customXml" ds:itemID="{146FE114-0C58-4EEA-8876-F3C08EF0B541}">
+  <ds:schemaRefs>
+    <ds:schemaRef ds:uri="http://schemas.microsoft.com/sharepoint/v3/contenttype/forms"/>
+  </ds:schemaRefs>
+</ds:datastoreItem>
 </file>